--- a/Introduccion a la Ingenieria/Clases/Clase 15 - Exposicion final de proyectos/Presentacion.pptx
+++ b/Introduccion a la Ingenieria/Clases/Clase 15 - Exposicion final de proyectos/Presentacion.pptx
@@ -4900,7 +4900,7 @@
               </a:spcAft>
             </a:pPr>
             <a:r>
-              <a:rPr sz="1600" b="0" i="0">
+              <a:rPr sz="2000" b="0" i="0">
                 <a:solidFill>
                   <a:srgbClr val="333333"/>
                 </a:solidFill>
@@ -4909,7 +4909,7 @@
               <a:t>–   </a:t>
             </a:r>
             <a:r>
-              <a:rPr sz="1600" b="1" i="0">
+              <a:rPr sz="2000" b="1" i="0">
                 <a:solidFill>
                   <a:srgbClr val="333333"/>
                 </a:solidFill>
@@ -4918,7 +4918,7 @@
               <a:t>Trabajo dirigido:</a:t>
             </a:r>
             <a:r>
-              <a:rPr sz="1600" b="0" i="0">
+              <a:rPr sz="2000" b="0" i="0">
                 <a:solidFill>
                   <a:srgbClr val="333333"/>
                 </a:solidFill>
@@ -4934,7 +4934,7 @@
               </a:spcAft>
             </a:pPr>
             <a:r>
-              <a:rPr sz="1600" b="0" i="0">
+              <a:rPr sz="2000" b="0" i="0">
                 <a:solidFill>
                   <a:srgbClr val="333333"/>
                 </a:solidFill>
@@ -4943,7 +4943,7 @@
               <a:t>–   </a:t>
             </a:r>
             <a:r>
-              <a:rPr sz="1600" b="1" i="0">
+              <a:rPr sz="2000" b="1" i="0">
                 <a:solidFill>
                   <a:srgbClr val="333333"/>
                 </a:solidFill>
@@ -4952,7 +4952,7 @@
               <a:t>Trabajo independiente:</a:t>
             </a:r>
             <a:r>
-              <a:rPr sz="1600" b="0" i="0">
+              <a:rPr sz="2000" b="0" i="0">
                 <a:solidFill>
                   <a:srgbClr val="333333"/>
                 </a:solidFill>
@@ -4961,7 +4961,7 @@
               <a:t> Ajustes del informe final: </a:t>
             </a:r>
             <a:r>
-              <a:rPr sz="1600" b="1" i="0">
+              <a:rPr sz="2000" b="1" i="0">
                 <a:solidFill>
                   <a:srgbClr val="333333"/>
                 </a:solidFill>
@@ -4970,7 +4970,7 @@
               <a:t>reunir las doce secciones</a:t>
             </a:r>
             <a:r>
-              <a:rPr sz="1600" b="0" i="0">
+              <a:rPr sz="2000" b="0" i="0">
                 <a:solidFill>
                   <a:srgbClr val="333333"/>
                 </a:solidFill>
@@ -4979,7 +4979,7 @@
               <a:t> en un solo documento, tomando lo que ya está escrito desde la sesión 3, y </a:t>
             </a:r>
             <a:r>
-              <a:rPr sz="1600" b="1" i="0">
+              <a:rPr sz="2000" b="1" i="0">
                 <a:solidFill>
                   <a:srgbClr val="333333"/>
                 </a:solidFill>
@@ -4988,7 +4988,7 @@
               <a:t>escribir el resumen de media página</a:t>
             </a:r>
             <a:r>
-              <a:rPr sz="1600" b="0" i="0">
+              <a:rPr sz="2000" b="0" i="0">
                 <a:solidFill>
                   <a:srgbClr val="333333"/>
                 </a:solidFill>
@@ -4997,7 +4997,7 @@
               <a:t>, que es lo único nuevo. Y una tarea corta que vale mucho: </a:t>
             </a:r>
             <a:r>
-              <a:rPr sz="1600" b="1" i="0">
+              <a:rPr sz="2000" b="1" i="0">
                 <a:solidFill>
                   <a:srgbClr val="333333"/>
                 </a:solidFill>
@@ -5006,7 +5006,7 @@
               <a:t>anotar lo que el curso no entendió</a:t>
             </a:r>
             <a:r>
-              <a:rPr sz="1600" b="0" i="0">
+              <a:rPr sz="2000" b="0" i="0">
                 <a:solidFill>
                   <a:srgbClr val="333333"/>
                 </a:solidFill>
@@ -5022,7 +5022,7 @@
               </a:spcAft>
             </a:pPr>
             <a:r>
-              <a:rPr sz="1600" b="0" i="0">
+              <a:rPr sz="2000" b="0" i="0">
                 <a:solidFill>
                   <a:srgbClr val="333333"/>
                 </a:solidFill>
@@ -5031,7 +5031,7 @@
               <a:t>–   </a:t>
             </a:r>
             <a:r>
-              <a:rPr sz="1600" b="1" i="0">
+              <a:rPr sz="2000" b="1" i="0">
                 <a:solidFill>
                   <a:srgbClr val="333333"/>
                 </a:solidFill>
@@ -5040,7 +5040,7 @@
               <a:t>Sesión 16 · Socialización y evaluación final del curso</a:t>
             </a:r>
             <a:r>
-              <a:rPr sz="1600" b="0" i="0">
+              <a:rPr sz="2000" b="0" i="0">
                 <a:solidFill>
                   <a:srgbClr val="333333"/>
                 </a:solidFill>
@@ -5049,7 +5049,7 @@
               <a:t> — es la última: se </a:t>
             </a:r>
             <a:r>
-              <a:rPr sz="1600" b="1" i="0">
+              <a:rPr sz="2000" b="1" i="0">
                 <a:solidFill>
                   <a:srgbClr val="333333"/>
                 </a:solidFill>
@@ -5058,7 +5058,7 @@
               <a:t>entrega el informe final (20 %)</a:t>
             </a:r>
             <a:r>
-              <a:rPr sz="1600" b="0" i="0">
+              <a:rPr sz="2000" b="0" i="0">
                 <a:solidFill>
                   <a:srgbClr val="333333"/>
                 </a:solidFill>
@@ -5067,7 +5067,7 @@
               <a:t>, se socializa la galería de proyectos del curso y se hace la </a:t>
             </a:r>
             <a:r>
-              <a:rPr sz="1600" b="1" i="0">
+              <a:rPr sz="2000" b="1" i="0">
                 <a:solidFill>
                   <a:srgbClr val="333333"/>
                 </a:solidFill>
@@ -5076,7 +5076,7 @@
               <a:t>autoevaluación y coevaluación</a:t>
             </a:r>
             <a:r>
-              <a:rPr sz="1600" b="0" i="0">
+              <a:rPr sz="2000" b="0" i="0">
                 <a:solidFill>
                   <a:srgbClr val="333333"/>
                 </a:solidFill>
@@ -5092,7 +5092,7 @@
               </a:spcAft>
             </a:pPr>
             <a:r>
-              <a:rPr sz="1600" b="0" i="0">
+              <a:rPr sz="2000" b="0" i="0">
                 <a:solidFill>
                   <a:srgbClr val="333333"/>
                 </a:solidFill>
@@ -5101,7 +5101,7 @@
               <a:t>–   </a:t>
             </a:r>
             <a:r>
-              <a:rPr sz="1600" b="1" i="0">
+              <a:rPr sz="2000" b="1" i="0">
                 <a:solidFill>
                   <a:srgbClr val="333333"/>
                 </a:solidFill>
@@ -5110,7 +5110,7 @@
               <a:t>Aviso:</a:t>
             </a:r>
             <a:r>
-              <a:rPr sz="1600" b="0" i="0">
+              <a:rPr sz="2000" b="0" i="0">
                 <a:solidFill>
                   <a:srgbClr val="333333"/>
                 </a:solidFill>
@@ -5119,7 +5119,7 @@
               <a:t> El informe se entrega </a:t>
             </a:r>
             <a:r>
-              <a:rPr sz="1600" b="1" i="0">
+              <a:rPr sz="2000" b="1" i="0">
                 <a:solidFill>
                   <a:srgbClr val="333333"/>
                 </a:solidFill>
@@ -5128,7 +5128,7 @@
               <a:t>en la sesión 16, dentro de la clase</a:t>
             </a:r>
             <a:r>
-              <a:rPr sz="1600" b="0" i="0">
+              <a:rPr sz="2000" b="0" i="0">
                 <a:solidFill>
                   <a:srgbClr val="333333"/>
                 </a:solidFill>
@@ -5144,7 +5144,7 @@
               </a:spcAft>
             </a:pPr>
             <a:r>
-              <a:rPr sz="1600" b="0" i="0">
+              <a:rPr sz="2000" b="0" i="0">
                 <a:solidFill>
                   <a:srgbClr val="333333"/>
                 </a:solidFill>
@@ -5153,7 +5153,7 @@
               <a:t>–   </a:t>
             </a:r>
             <a:r>
-              <a:rPr sz="1600" b="1" i="0">
+              <a:rPr sz="2000" b="1" i="0">
                 <a:solidFill>
                   <a:srgbClr val="333333"/>
                 </a:solidFill>
@@ -5162,7 +5162,7 @@
               <a:t>Antes de salir:</a:t>
             </a:r>
             <a:r>
-              <a:rPr sz="1600" b="0" i="0">
+              <a:rPr sz="2000" b="0" i="0">
                 <a:solidFill>
                   <a:srgbClr val="333333"/>
                 </a:solidFill>
@@ -5736,7 +5736,7 @@
         <p:spPr>
           <a:xfrm>
             <a:off x="502920" y="2798064"/>
-            <a:ext cx="2727883" cy="2560320"/>
+            <a:ext cx="2727883" cy="3099816"/>
           </a:xfrm>
           <a:prstGeom prst="rect">
             <a:avLst/>
@@ -5851,7 +5851,7 @@
         <p:spPr>
           <a:xfrm>
             <a:off x="3322243" y="2798064"/>
-            <a:ext cx="2727883" cy="2560320"/>
+            <a:ext cx="2727883" cy="3099816"/>
           </a:xfrm>
           <a:prstGeom prst="rect">
             <a:avLst/>
@@ -5966,7 +5966,7 @@
         <p:spPr>
           <a:xfrm>
             <a:off x="6141567" y="2798064"/>
-            <a:ext cx="2727883" cy="2560320"/>
+            <a:ext cx="2727883" cy="3099816"/>
           </a:xfrm>
           <a:prstGeom prst="rect">
             <a:avLst/>
@@ -6081,7 +6081,7 @@
         <p:spPr>
           <a:xfrm>
             <a:off x="8960891" y="2798064"/>
-            <a:ext cx="2727883" cy="2560320"/>
+            <a:ext cx="2727883" cy="3099816"/>
           </a:xfrm>
           <a:prstGeom prst="rect">
             <a:avLst/>
@@ -6115,8 +6115,8 @@
         </p:nvSpPr>
         <p:spPr>
           <a:xfrm>
-            <a:off x="457200" y="5943600"/>
-            <a:ext cx="11277295" cy="365760"/>
+            <a:off x="457200" y="5806440"/>
+            <a:ext cx="11277295" cy="640080"/>
           </a:xfrm>
           <a:prstGeom prst="rect">
             <a:avLst/>
@@ -6131,7 +6131,7 @@
           <a:p>
             <a:pPr algn="ctr"/>
             <a:r>
-              <a:rPr sz="1200" b="1" i="1">
+              <a:rPr sz="1100" b="1" i="1">
                 <a:solidFill>
                   <a:srgbClr val="666666"/>
                 </a:solidFill>
@@ -6140,7 +6140,7 @@
               <a:t>Se corta a los nueve minutos</a:t>
             </a:r>
             <a:r>
-              <a:rPr sz="1200" b="0" i="1">
+              <a:rPr sz="1100" b="0" i="1">
                 <a:solidFill>
                   <a:srgbClr val="666666"/>
                 </a:solidFill>
@@ -6149,7 +6149,7 @@
               <a:t>, sin excepción y aunque quede una frase a medias: con cinco equipos en 90 minutos, el tiempo que un equipo se pasa lo pierde el último. Los </a:t>
             </a:r>
             <a:r>
-              <a:rPr sz="1200" b="1" i="1">
+              <a:rPr sz="1100" b="1" i="1">
                 <a:solidFill>
                   <a:srgbClr val="666666"/>
                 </a:solidFill>
@@ -6158,7 +6158,7 @@
               <a:t>tres minutos de preguntas</a:t>
             </a:r>
             <a:r>
-              <a:rPr sz="1200" b="0" i="1">
+              <a:rPr sz="1100" b="0" i="1">
                 <a:solidFill>
                   <a:srgbClr val="666666"/>
                 </a:solidFill>
@@ -6167,7 +6167,7 @@
               <a:t> también se califican, y </a:t>
             </a:r>
             <a:r>
-              <a:rPr sz="1200" b="1" i="1">
+              <a:rPr sz="1100" b="1" i="1">
                 <a:solidFill>
                   <a:srgbClr val="666666"/>
                 </a:solidFill>
@@ -6176,7 +6176,7 @@
               <a:t>cada integrante responde de su tramo</a:t>
             </a:r>
             <a:r>
-              <a:rPr sz="1200" b="0" i="1">
+              <a:rPr sz="1100" b="0" i="1">
                 <a:solidFill>
                   <a:srgbClr val="666666"/>
                 </a:solidFill>
@@ -6396,7 +6396,7 @@
               </a:spcAft>
             </a:pPr>
             <a:r>
-              <a:rPr sz="1600" b="0" i="0">
+              <a:rPr sz="2000" b="0" i="0">
                 <a:solidFill>
                   <a:srgbClr val="333333"/>
                 </a:solidFill>
@@ -6405,7 +6405,7 @@
               <a:t>–   Sustentar el proyecto en </a:t>
             </a:r>
             <a:r>
-              <a:rPr sz="1600" b="1" i="0">
+              <a:rPr sz="2000" b="1" i="0">
                 <a:solidFill>
                   <a:srgbClr val="333333"/>
                 </a:solidFill>
@@ -6414,7 +6414,7 @@
               <a:t>nueve minutos</a:t>
             </a:r>
             <a:r>
-              <a:rPr sz="1600" b="0" i="0">
+              <a:rPr sz="2000" b="0" i="0">
                 <a:solidFill>
                   <a:srgbClr val="333333"/>
                 </a:solidFill>
@@ -6430,7 +6430,7 @@
               </a:spcAft>
             </a:pPr>
             <a:r>
-              <a:rPr sz="1600" b="0" i="0">
+              <a:rPr sz="2000" b="0" i="0">
                 <a:solidFill>
                   <a:srgbClr val="333333"/>
                 </a:solidFill>
@@ -6439,7 +6439,7 @@
               <a:t>–   </a:t>
             </a:r>
             <a:r>
-              <a:rPr sz="1600" b="1" i="0">
+              <a:rPr sz="2000" b="1" i="0">
                 <a:solidFill>
                   <a:srgbClr val="333333"/>
                 </a:solidFill>
@@ -6448,7 +6448,7 @@
               <a:t>Mostrar el prototipo funcionando</a:t>
             </a:r>
             <a:r>
-              <a:rPr sz="1600" b="0" i="0">
+              <a:rPr sz="2000" b="0" i="0">
                 <a:solidFill>
                   <a:srgbClr val="333333"/>
                 </a:solidFill>
@@ -6464,7 +6464,7 @@
               </a:spcAft>
             </a:pPr>
             <a:r>
-              <a:rPr sz="1600" b="0" i="0">
+              <a:rPr sz="2000" b="0" i="0">
                 <a:solidFill>
                   <a:srgbClr val="333333"/>
                 </a:solidFill>
@@ -6473,7 +6473,7 @@
               <a:t>–   Responder preguntas del curso y del docente </a:t>
             </a:r>
             <a:r>
-              <a:rPr sz="1600" b="1" i="0">
+              <a:rPr sz="2000" b="1" i="0">
                 <a:solidFill>
                   <a:srgbClr val="333333"/>
                 </a:solidFill>
@@ -6482,7 +6482,7 @@
               <a:t>sobre el propio tramo</a:t>
             </a:r>
             <a:r>
-              <a:rPr sz="1600" b="0" i="0">
+              <a:rPr sz="2000" b="0" i="0">
                 <a:solidFill>
                   <a:srgbClr val="333333"/>
                 </a:solidFill>
@@ -6498,7 +6498,7 @@
               </a:spcAft>
             </a:pPr>
             <a:r>
-              <a:rPr sz="1600" b="0" i="0">
+              <a:rPr sz="2000" b="0" i="0">
                 <a:solidFill>
                   <a:srgbClr val="333333"/>
                 </a:solidFill>
@@ -6507,7 +6507,7 @@
               <a:t>–   Valorar el trabajo de los otros equipos con </a:t>
             </a:r>
             <a:r>
-              <a:rPr sz="1600" b="1" i="0">
+              <a:rPr sz="2000" b="1" i="0">
                 <a:solidFill>
                   <a:srgbClr val="333333"/>
                 </a:solidFill>
@@ -6516,7 +6516,7 @@
               <a:t>criterios y no con opiniones</a:t>
             </a:r>
             <a:r>
-              <a:rPr sz="1600" b="0" i="0">
+              <a:rPr sz="2000" b="0" i="0">
                 <a:solidFill>
                   <a:srgbClr val="333333"/>
                 </a:solidFill>

--- a/Introduccion a la Ingenieria/Clases/Clase 15 - Exposicion final de proyectos/Presentacion.pptx
+++ b/Introduccion a la Ingenieria/Clases/Clase 15 - Exposicion final de proyectos/Presentacion.pptx
@@ -4867,7 +4867,7 @@
                 </a:solidFill>
                 <a:latin typeface="Calibri"/>
               </a:rPr>
-              <a:t>Para la sesión 16</a:t>
+              <a:t>Para la Clase 16</a:t>
             </a:r>
           </a:p>
         </p:txBody>
@@ -5037,7 +5037,7 @@
                 </a:solidFill>
                 <a:latin typeface="Calibri"/>
               </a:rPr>
-              <a:t>Sesión 16 · Socialización y evaluación final del curso</a:t>
+              <a:t>Clase 16 · Socialización y evaluación final del curso</a:t>
             </a:r>
             <a:r>
               <a:rPr sz="2000" b="0" i="0">
@@ -5125,7 +5125,7 @@
                 </a:solidFill>
                 <a:latin typeface="Calibri"/>
               </a:rPr>
-              <a:t>en la sesión 16, dentro de la clase</a:t>
+              <a:t>en la Clase 16, dentro de la clase</a:t>
             </a:r>
             <a:r>
               <a:rPr sz="2000" b="0" i="0">
@@ -5329,7 +5329,7 @@
                 </a:solidFill>
                 <a:latin typeface="Calibri"/>
               </a:rPr>
-              <a:t>Nos vemos en la sesión 16 · la última</a:t>
+              <a:t>Nos vemos en la Clase 16 · la última</a:t>
             </a:r>
           </a:p>
         </p:txBody>
@@ -9957,7 +9957,7 @@
                 </a:solidFill>
                 <a:latin typeface="Calibri"/>
               </a:rPr>
-              <a:t>. Es literalmente para hoy que se preparó eso en la sesión 14.</a:t>
+              <a:t>. Es literalmente para hoy que se preparó eso en la Clase 14.</a:t>
             </a:r>
           </a:p>
         </p:txBody>
@@ -10260,7 +10260,7 @@
                 </a:solidFill>
                 <a:latin typeface="Calibri"/>
               </a:rPr>
-              <a:t>informe final de la sesión 16, que vale el 20 %</a:t>
+              <a:t>informe final de la Clase 16, que vale el 20 %</a:t>
             </a:r>
             <a:r>
               <a:rPr sz="1400" b="0" i="0">
